--- a/formation/exports/slides.pptx
+++ b/formation/exports/slides.pptx
@@ -8949,7 +8949,7 @@
                   <a:srgbClr val="FFFFFF"/>
                 </a:solidFill>
               </a:rPr>
-              <a:t>Syllabus 0.1 · 15 modules · 42 heures</a:t>
+              <a:t>Syllabus · 15 modules · 42 heures</a:t>
             </a:r>
             <a:endParaRPr lang="en-US" sz="2100" dirty="0"/>
           </a:p>
